--- a/decks/geog-living-world/geog-living-world_ch4_deforestation-and-management.pptx
+++ b/decks/geog-living-world/geog-living-world_ch4_deforestation-and-management.pptx
@@ -129,30 +129,30 @@
   <p:extLst>
     <p:ext uri="{521415D9-36F7-43E2-AB2F-B90AF26B5E84}">
       <p14:sectionLst xmlns:p14="http://schemas.microsoft.com/office/powerpoint/2010/main">
-        <p14:section name="Opening" id="{da30e249-090e-e8cc-3d78-7f1e1f950473}">
+        <p14:section name="Opening" id="{0474b56c-04dd-b77b-8acb-53602b455ef6}">
           <p14:sldIdLst>
             <p14:sldId id="256"/>
           </p14:sldIdLst>
         </p14:section>
-        <p14:section name="Gate" id="{6c833845-c36e-6bfd-8749-6ab93ec08efe}">
+        <p14:section name="Gate" id="{ed3314bc-27bc-91c0-79af-19335d9164ec}">
           <p14:sldIdLst>
             <p14:sldId id="257"/>
             <p14:sldId id="258"/>
           </p14:sldIdLst>
         </p14:section>
-        <p14:section name="Pre-teach" id="{1092cbcd-6281-d255-044e-657f9c3fca21}">
+        <p14:section name="Pre-teach" id="{72eedbd2-5777-8edb-7fc2-cf6e53c6a43b}">
           <p14:sldIdLst>
             <p14:sldId id="259"/>
             <p14:sldId id="260"/>
           </p14:sldIdLst>
         </p14:section>
-        <p14:section name="Read-along" id="{d41f748c-a91c-7ab1-b90b-4b10eb220a42}">
+        <p14:section name="Read-along" id="{4110bf34-a021-743c-29f3-9dcb4162afd6}">
           <p14:sldIdLst>
             <p14:sldId id="261"/>
             <p14:sldId id="262"/>
           </p14:sldIdLst>
         </p14:section>
-        <p14:section name="Teach" id="{ece46b61-11ea-77c3-bf0b-b2f8d44a6970}">
+        <p14:section name="Teach" id="{ef270de9-b0fb-899e-b283-d8a95b0abc52}">
           <p14:sldIdLst>
             <p14:sldId id="263"/>
             <p14:sldId id="264"/>
@@ -162,7 +162,7 @@
             <p14:sldId id="268"/>
           </p14:sldIdLst>
         </p14:section>
-        <p14:section name="Routes" id="{0063ada5-8a19-ab96-6b91-e48a4c237c74}">
+        <p14:section name="Routes" id="{5e1007c4-c6d4-e700-b7e3-3aa6b919b9f0}">
           <p14:sldIdLst>
             <p14:sldId id="269"/>
             <p14:sldId id="270"/>
@@ -172,12 +172,12 @@
             <p14:sldId id="274"/>
           </p14:sldIdLst>
         </p14:section>
-        <p14:section name="Close" id="{9ae90500-1815-7d21-04a7-4fc37cfcf18f}">
+        <p14:section name="Close" id="{90eb7462-3517-5e48-6df1-10ab49fffc19}">
           <p14:sldIdLst>
             <p14:sldId id="275"/>
           </p14:sldIdLst>
         </p14:section>
-        <p14:section name="Answers" id="{b5477bbb-98bb-dc40-4321-add1d2112a6f}">
+        <p14:section name="Answers" id="{6ed91bcd-e8c5-3dad-d48b-4bc08d2a8413}">
           <p14:sldIdLst>
             <p14:sldId id="276"/>
             <p14:sldId id="277"/>
@@ -959,7 +959,7 @@
               <a:rPr lang="en-US" dirty="0"/>
               <a:t>Teach — Managing rainforests sustainably. Say it in your own words, then check understanding with a quick question: ask a pupil from the pre-teach group first, since they met these words and ideas before the lesson. Pupils try to recall before you re-explain.
 Sustainable development means meeting the needs of the present without compromising the needs of the future. For a rainforest it means using its resources in a way that keeps the forest for the future, while still allowing economic development and protecting the health of the people who live there. Your Amazon lesson looked at five strategies. Selective logging cuts trees only when they reach a particular height, so younger trees are left with a guaranteed life span and the forest regains full maturity after around 30 to 50 years; the canopy is protected, parent trees drop seeds and the roots keep the topsoil healthy, yet money is still made from timber. Its weakness: illegal loggers do not follow the rules. Agroforestry grows valuable crops such as coffee and cacao under the canopy; nothing is cleared, leaf litter keeps the soil fertile so less fertiliser is needed, and fruit trees such as avocado and guava go on producing year after year. The main drawback is the risk from introduced non-native species.
-Forest reserves, also called national parks, are large protected areas where no logging is allowed, preserving untouched forest for the future. In 2002 Brazil created the largest in the world, the Tumucumaque National Park, covering nearly 4 million hectares in the state of Amapa and home to jaguars, sloths and freshwater turtles. Critics worry that corruption and a lack of funding mean poaching and illegal logging continue; park staff on very low wages may be open to bribery, so the park seeks money from the World Wildlife Fund and the World Bank. Afforestation is the opposite of deforestation: replanting trees to restore the canopy. The Brazilian state of Para set a goal of replanting 1 billion trees to replace those lost to logging, funded by government and private companies, aiming to cut greenhouse gases by 5 %. But a tropical tree takes around 30 years to mature, so a rainforest ecosystem is slow to re-establish. Satellite monitoring uses satellite images, aerial photography and GIS to track changes in the forest, spot where deforestation is speeding up and send teams to challenge illegal logging. A non-profit organisation (Imazon) working with the Brazilian government used real-time images and a system of sanctions and rewards, and in 2013 the deforestation rate fell by 70 % compared with the previous year.
+Forest reserves, also called national parks, are large protected areas where no logging is allowed, preserving untouched forest for the future. In 2002 Brazil created the biggest one anywhere: Tumucumaque, in the northern state of Amapa, which protects nearly 4 million hectares and shelters jaguars, sloths and freshwater turtles. Critics worry that corruption and a lack of funding mean poaching and illegal logging continue; park staff on very low wages may be open to bribery, so the park seeks money from the World Wildlife Fund and the World Bank. Afforestation is the opposite of deforestation: replanting trees to restore the canopy. The Brazilian state of Para set a goal of replanting 1 billion trees to replace those lost to logging, funded by government and private companies, aiming to cut greenhouse gases by 5 %. But a tropical tree takes around 30 years to mature, so a rainforest ecosystem is slow to re-establish. Satellite monitoring uses satellite images, aerial photography and GIS to track changes in the forest, spot where deforestation is speeding up and send teams to challenge illegal logging. A non-profit organisation (Imazon) working with the Brazilian government used real-time images and a system of sanctions and rewards, and in 2013 the deforestation rate fell by 70 % compared with the previous year.
 Why is sustainable management so hard in the Amazon? Your class listed the barriers: it covers nine South American countries, which must co-operate; poverty means the need to develop outweighs protection; illegal logging is hard to stop; people need education; patrolling a vast area costs money; and the growing demand for food, farmland and palm oil is difficult to resist. Your stakeholder debate (government, indigenous people, a meat company, an environmental campaigner) showed that each group values the forest differently, and that is why a conclusion must weigh the sides rather than pick one.
 Tip: Five strategies, five examples: height limit (30 to 50 years), coffee under the canopy, Tumucumaque 2002, a billion trees in Para, satellites and a 70 % fall.</a:t>
             </a:r>
